--- a/weekly_presentations/week05_engine_milestone1.pptx
+++ b/weekly_presentations/week05_engine_milestone1.pptx
@@ -14,6 +14,7 @@
     <p:sldId id="262" r:id="rId13"/>
     <p:sldId id="263" r:id="rId14"/>
     <p:sldId id="264" r:id="rId15"/>
+    <p:sldId id="265" r:id="rId16"/>
   </p:sldIdLst>
   <p:sldSz cx="12191695" cy="6858000" type="screen4x3"/>
   <p:notesSz cx="6858000" cy="9144000"/>
@@ -3250,6 +3251,164 @@
 </p:sld>
 </file>
 
+<file path=ppt/slides/slide10.xml><?xml version="1.0" encoding="utf-8"?>
+<p:sld xmlns:a="http://schemas.openxmlformats.org/drawingml/2006/main" xmlns:p="http://schemas.openxmlformats.org/presentationml/2006/main" xmlns:r="http://schemas.openxmlformats.org/officeDocument/2006/relationships">
+  <p:cSld>
+    <p:spTree>
+      <p:nvGrpSpPr>
+        <p:cNvPr id="1" name=""/>
+        <p:cNvGrpSpPr/>
+        <p:nvPr/>
+      </p:nvGrpSpPr>
+      <p:grpSpPr/>
+      <p:pic>
+        <p:nvPicPr>
+          <p:cNvPr id="2" name="Picture 1" descr="ncsu_logo.png"/>
+          <p:cNvPicPr>
+            <a:picLocks noChangeAspect="1"/>
+          </p:cNvPicPr>
+          <p:nvPr/>
+        </p:nvPicPr>
+        <p:blipFill>
+          <a:blip r:embed="rId2"/>
+          <a:stretch>
+            <a:fillRect/>
+          </a:stretch>
+        </p:blipFill>
+        <p:spPr>
+          <a:xfrm>
+            <a:off x="9784080" y="274320"/>
+            <a:ext cx="2011680" cy="316653"/>
+          </a:xfrm>
+          <a:prstGeom prst="rect">
+            <a:avLst/>
+          </a:prstGeom>
+        </p:spPr>
+      </p:pic>
+      <p:sp>
+        <p:nvSpPr>
+          <p:cNvPr id="3" name="TextBox 2"/>
+          <p:cNvSpPr txBox="1"/>
+          <p:nvPr/>
+        </p:nvSpPr>
+        <p:spPr>
+          <a:xfrm>
+            <a:off x="457200" y="457200"/>
+            <a:ext cx="8961120" cy="822960"/>
+          </a:xfrm>
+          <a:prstGeom prst="rect">
+            <a:avLst/>
+          </a:prstGeom>
+          <a:noFill/>
+        </p:spPr>
+        <p:txBody>
+          <a:bodyPr wrap="square">
+            <a:spAutoFit/>
+          </a:bodyPr>
+          <a:lstStyle/>
+          <a:p>
+            <a:r>
+              <a:rPr sz="2400" b="1" i="0">
+                <a:solidFill>
+                  <a:srgbClr val="990000"/>
+                </a:solidFill>
+                <a:latin typeface="Arial"/>
+              </a:rPr>
+              <a:t>Reading</a:t>
+            </a:r>
+          </a:p>
+        </p:txBody>
+      </p:sp>
+      <p:sp>
+        <p:nvSpPr>
+          <p:cNvPr id="4" name="Rectangle 3"/>
+          <p:cNvSpPr/>
+          <p:nvPr/>
+        </p:nvSpPr>
+        <p:spPr>
+          <a:xfrm>
+            <a:off x="457200" y="1371600"/>
+            <a:ext cx="11247120" cy="27940"/>
+          </a:xfrm>
+          <a:prstGeom prst="rect">
+            <a:avLst/>
+          </a:prstGeom>
+          <a:solidFill>
+            <a:srgbClr val="CC0000"/>
+          </a:solidFill>
+          <a:ln>
+            <a:noFill/>
+          </a:ln>
+        </p:spPr>
+        <p:style>
+          <a:lnRef idx="1">
+            <a:schemeClr val="accent1"/>
+          </a:lnRef>
+          <a:fillRef idx="3">
+            <a:schemeClr val="accent1"/>
+          </a:fillRef>
+          <a:effectRef idx="2">
+            <a:schemeClr val="accent1"/>
+          </a:effectRef>
+          <a:fontRef idx="minor">
+            <a:schemeClr val="lt1"/>
+          </a:fontRef>
+        </p:style>
+        <p:txBody>
+          <a:bodyPr rtlCol="0" anchor="ctr"/>
+          <a:lstStyle/>
+          <a:p>
+            <a:pPr algn="ctr"/>
+          </a:p>
+        </p:txBody>
+      </p:sp>
+      <p:sp>
+        <p:nvSpPr>
+          <p:cNvPr id="5" name="TextBox 4"/>
+          <p:cNvSpPr txBox="1"/>
+          <p:nvPr/>
+        </p:nvSpPr>
+        <p:spPr>
+          <a:xfrm>
+            <a:off x="640080" y="1600200"/>
+            <a:ext cx="10972800" cy="4937760"/>
+          </a:xfrm>
+          <a:prstGeom prst="rect">
+            <a:avLst/>
+          </a:prstGeom>
+          <a:noFill/>
+        </p:spPr>
+        <p:txBody>
+          <a:bodyPr wrap="square">
+            <a:spAutoFit/>
+          </a:bodyPr>
+          <a:lstStyle/>
+          <a:p>
+            <a:pPr>
+              <a:spcAft>
+                <a:spcPts val="800"/>
+              </a:spcAft>
+            </a:pPr>
+            <a:r>
+              <a:rPr sz="1700" b="0" i="0">
+                <a:solidFill>
+                  <a:srgbClr val="1A1A1A"/>
+                </a:solidFill>
+                <a:latin typeface="Arial"/>
+              </a:rPr>
+              <a:t>•  Avellaneda-Stoikov (2008) [implementation]; Gueant (2016), Ch. 4</a:t>
+            </a:r>
+          </a:p>
+        </p:txBody>
+      </p:sp>
+    </p:spTree>
+  </p:cSld>
+  <p:clrMapOvr>
+    <a:masterClrMapping/>
+  </p:clrMapOvr>
+</p:sld>
+</file>
+
 <file path=ppt/slides/slide2.xml><?xml version="1.0" encoding="utf-8"?>
 <p:sld xmlns:a="http://schemas.openxmlformats.org/drawingml/2006/main" xmlns:p="http://schemas.openxmlformats.org/presentationml/2006/main" xmlns:r="http://schemas.openxmlformats.org/officeDocument/2006/relationships">
   <p:cSld>
@@ -4707,7 +4866,7 @@
           <a:noFill/>
         </p:spPr>
         <p:txBody>
-          <a:bodyPr wrap="square">
+          <a:bodyPr wrap="none">
             <a:spAutoFit/>
           </a:bodyPr>
           <a:lstStyle/>
@@ -4719,7 +4878,7 @@
                 </a:solidFill>
                 <a:latin typeface="Arial"/>
               </a:rPr>
-              <a:t>Reading</a:t>
+              <a:t>Glossary — Key Terms</a:t>
             </a:r>
           </a:p>
         </p:txBody>
@@ -4791,17 +4950,176 @@
           <a:p>
             <a:pPr>
               <a:spcAft>
-                <a:spcPts val="800"/>
+                <a:spcPts val="700"/>
               </a:spcAft>
             </a:pPr>
             <a:r>
-              <a:rPr sz="1700" b="0" i="0">
+              <a:rPr sz="1500" b="1" i="0">
+                <a:solidFill>
+                  <a:srgbClr val="CC0000"/>
+                </a:solidFill>
+                <a:latin typeface="Arial"/>
+              </a:rPr>
+              <a:t>Maximum likelihood (MLE) — </a:t>
+            </a:r>
+            <a:r>
+              <a:rPr sz="1500" b="0" i="0">
                 <a:solidFill>
                   <a:srgbClr val="1A1A1A"/>
                 </a:solidFill>
                 <a:latin typeface="Arial"/>
               </a:rPr>
-              <a:t>•  Avellaneda-Stoikov (2008) [implementation]; Gueant (2016), Ch. 4</a:t>
+              <a:t>fitting parameters by maximizing the likelihood of the data</a:t>
+            </a:r>
+          </a:p>
+          <a:p>
+            <a:pPr>
+              <a:spcAft>
+                <a:spcPts val="700"/>
+              </a:spcAft>
+            </a:pPr>
+            <a:r>
+              <a:rPr sz="1500" b="1" i="0">
+                <a:solidFill>
+                  <a:srgbClr val="CC0000"/>
+                </a:solidFill>
+                <a:latin typeface="Arial"/>
+              </a:rPr>
+              <a:t>Poisson process — </a:t>
+            </a:r>
+            <a:r>
+              <a:rPr sz="1500" b="0" i="0">
+                <a:solidFill>
+                  <a:srgbClr val="1A1A1A"/>
+                </a:solidFill>
+                <a:latin typeface="Arial"/>
+              </a:rPr>
+              <a:t>counting process for random arrivals (here, fills)</a:t>
+            </a:r>
+          </a:p>
+          <a:p>
+            <a:pPr>
+              <a:spcAft>
+                <a:spcPts val="700"/>
+              </a:spcAft>
+            </a:pPr>
+            <a:r>
+              <a:rPr sz="1500" b="1" i="0">
+                <a:solidFill>
+                  <a:srgbClr val="CC0000"/>
+                </a:solidFill>
+                <a:latin typeface="Arial"/>
+              </a:rPr>
+              <a:t>Goodness-of-fit (chi-square) — </a:t>
+            </a:r>
+            <a:r>
+              <a:rPr sz="1500" b="0" i="0">
+                <a:solidFill>
+                  <a:srgbClr val="1A1A1A"/>
+                </a:solidFill>
+                <a:latin typeface="Arial"/>
+              </a:rPr>
+              <a:t>a statistic measuring how well the fit matches the data</a:t>
+            </a:r>
+          </a:p>
+          <a:p>
+            <a:pPr>
+              <a:spcAft>
+                <a:spcPts val="700"/>
+              </a:spcAft>
+            </a:pPr>
+            <a:r>
+              <a:rPr sz="1500" b="1" i="0">
+                <a:solidFill>
+                  <a:srgbClr val="CC0000"/>
+                </a:solidFill>
+                <a:latin typeface="Arial"/>
+              </a:rPr>
+              <a:t>Backtest — </a:t>
+            </a:r>
+            <a:r>
+              <a:rPr sz="1500" b="0" i="0">
+                <a:solidFill>
+                  <a:srgbClr val="1A1A1A"/>
+                </a:solidFill>
+                <a:latin typeface="Arial"/>
+              </a:rPr>
+              <a:t>simulation of a strategy on historical data</a:t>
+            </a:r>
+          </a:p>
+          <a:p>
+            <a:pPr>
+              <a:spcAft>
+                <a:spcPts val="700"/>
+              </a:spcAft>
+            </a:pPr>
+            <a:r>
+              <a:rPr sz="1500" b="1" i="0">
+                <a:solidFill>
+                  <a:srgbClr val="CC0000"/>
+                </a:solidFill>
+                <a:latin typeface="Arial"/>
+              </a:rPr>
+              <a:t>Fill simulator — </a:t>
+            </a:r>
+            <a:r>
+              <a:rPr sz="1500" b="0" i="0">
+                <a:solidFill>
+                  <a:srgbClr val="1A1A1A"/>
+                </a:solidFill>
+                <a:latin typeface="Arial"/>
+              </a:rPr>
+              <a:t>model of which of the maker's quotes get executed</a:t>
+            </a:r>
+          </a:p>
+          <a:p>
+            <a:pPr>
+              <a:spcAft>
+                <a:spcPts val="700"/>
+              </a:spcAft>
+            </a:pPr>
+            <a:r>
+              <a:rPr sz="1500" b="1" i="0">
+                <a:solidFill>
+                  <a:srgbClr val="CC0000"/>
+                </a:solidFill>
+                <a:latin typeface="Arial"/>
+              </a:rPr>
+              <a:t>P&amp;L attribution — </a:t>
+            </a:r>
+            <a:r>
+              <a:rPr sz="1500" b="0" i="0">
+                <a:solidFill>
+                  <a:srgbClr val="1A1A1A"/>
+                </a:solidFill>
+                <a:latin typeface="Arial"/>
+              </a:rPr>
+              <a:t>decomposition of profit into its sources</a:t>
+            </a:r>
+          </a:p>
+          <a:p>
+            <a:pPr>
+              <a:spcAft>
+                <a:spcPts val="700"/>
+              </a:spcAft>
+            </a:pPr>
+            <a:r>
+              <a:rPr sz="1500" b="1" i="0">
+                <a:solidFill>
+                  <a:srgbClr val="CC0000"/>
+                </a:solidFill>
+                <a:latin typeface="Arial"/>
+              </a:rPr>
+              <a:t>Reproducibility — </a:t>
+            </a:r>
+            <a:r>
+              <a:rPr sz="1500" b="0" i="0">
+                <a:solidFill>
+                  <a:srgbClr val="1A1A1A"/>
+                </a:solidFill>
+                <a:latin typeface="Arial"/>
+              </a:rPr>
+              <a:t>identical results on re-run under a fixed random seed</a:t>
             </a:r>
           </a:p>
         </p:txBody>

--- a/weekly_presentations/week05_engine_milestone1.pptx
+++ b/weekly_presentations/week05_engine_milestone1.pptx
@@ -15,6 +15,7 @@
     <p:sldId id="263" r:id="rId14"/>
     <p:sldId id="264" r:id="rId15"/>
     <p:sldId id="265" r:id="rId16"/>
+    <p:sldId id="266" r:id="rId17"/>
   </p:sldIdLst>
   <p:sldSz cx="12191695" cy="6858000" type="screen4x3"/>
   <p:notesSz cx="6858000" cy="9144000"/>
@@ -3397,6 +3398,212 @@
                 <a:latin typeface="Arial"/>
               </a:rPr>
               <a:t>•  Avellaneda-Stoikov (2008) [implementation]; Gueant (2016), Ch. 4</a:t>
+            </a:r>
+          </a:p>
+        </p:txBody>
+      </p:sp>
+    </p:spTree>
+  </p:cSld>
+  <p:clrMapOvr>
+    <a:masterClrMapping/>
+  </p:clrMapOvr>
+</p:sld>
+</file>
+
+<file path=ppt/slides/slide11.xml><?xml version="1.0" encoding="utf-8"?>
+<p:sld xmlns:a="http://schemas.openxmlformats.org/drawingml/2006/main" xmlns:p="http://schemas.openxmlformats.org/presentationml/2006/main" xmlns:r="http://schemas.openxmlformats.org/officeDocument/2006/relationships">
+  <p:cSld>
+    <p:spTree>
+      <p:nvGrpSpPr>
+        <p:cNvPr id="1" name=""/>
+        <p:cNvGrpSpPr/>
+        <p:nvPr/>
+      </p:nvGrpSpPr>
+      <p:grpSpPr/>
+      <p:pic>
+        <p:nvPicPr>
+          <p:cNvPr id="2" name="Picture 1" descr="ncsu_logo.png"/>
+          <p:cNvPicPr>
+            <a:picLocks noChangeAspect="1"/>
+          </p:cNvPicPr>
+          <p:nvPr/>
+        </p:nvPicPr>
+        <p:blipFill>
+          <a:blip r:embed="rId2"/>
+          <a:stretch>
+            <a:fillRect/>
+          </a:stretch>
+        </p:blipFill>
+        <p:spPr>
+          <a:xfrm>
+            <a:off x="9784080" y="274320"/>
+            <a:ext cx="2011680" cy="316653"/>
+          </a:xfrm>
+          <a:prstGeom prst="rect">
+            <a:avLst/>
+          </a:prstGeom>
+        </p:spPr>
+      </p:pic>
+      <p:sp>
+        <p:nvSpPr>
+          <p:cNvPr id="3" name="TextBox 2"/>
+          <p:cNvSpPr txBox="1"/>
+          <p:nvPr/>
+        </p:nvSpPr>
+        <p:spPr>
+          <a:xfrm>
+            <a:off x="457200" y="457200"/>
+            <a:ext cx="8961120" cy="822960"/>
+          </a:xfrm>
+          <a:prstGeom prst="rect">
+            <a:avLst/>
+          </a:prstGeom>
+          <a:noFill/>
+        </p:spPr>
+        <p:txBody>
+          <a:bodyPr wrap="square">
+            <a:spAutoFit/>
+          </a:bodyPr>
+          <a:lstStyle/>
+          <a:p>
+            <a:r>
+              <a:rPr sz="2400" b="1" i="0">
+                <a:solidFill>
+                  <a:srgbClr val="990000"/>
+                </a:solidFill>
+                <a:latin typeface="Arial"/>
+              </a:rPr>
+              <a:t>References</a:t>
+            </a:r>
+          </a:p>
+        </p:txBody>
+      </p:sp>
+      <p:sp>
+        <p:nvSpPr>
+          <p:cNvPr id="4" name="Rectangle 3"/>
+          <p:cNvSpPr/>
+          <p:nvPr/>
+        </p:nvSpPr>
+        <p:spPr>
+          <a:xfrm>
+            <a:off x="457200" y="1371600"/>
+            <a:ext cx="11247120" cy="27940"/>
+          </a:xfrm>
+          <a:prstGeom prst="rect">
+            <a:avLst/>
+          </a:prstGeom>
+          <a:solidFill>
+            <a:srgbClr val="CC0000"/>
+          </a:solidFill>
+          <a:ln>
+            <a:noFill/>
+          </a:ln>
+        </p:spPr>
+        <p:style>
+          <a:lnRef idx="1">
+            <a:schemeClr val="accent1"/>
+          </a:lnRef>
+          <a:fillRef idx="3">
+            <a:schemeClr val="accent1"/>
+          </a:fillRef>
+          <a:effectRef idx="2">
+            <a:schemeClr val="accent1"/>
+          </a:effectRef>
+          <a:fontRef idx="minor">
+            <a:schemeClr val="lt1"/>
+          </a:fontRef>
+        </p:style>
+        <p:txBody>
+          <a:bodyPr rtlCol="0" anchor="ctr"/>
+          <a:lstStyle/>
+          <a:p>
+            <a:pPr algn="ctr"/>
+          </a:p>
+        </p:txBody>
+      </p:sp>
+      <p:sp>
+        <p:nvSpPr>
+          <p:cNvPr id="5" name="TextBox 4"/>
+          <p:cNvSpPr txBox="1"/>
+          <p:nvPr/>
+        </p:nvSpPr>
+        <p:spPr>
+          <a:xfrm>
+            <a:off x="640080" y="1600200"/>
+            <a:ext cx="10972800" cy="4937760"/>
+          </a:xfrm>
+          <a:prstGeom prst="rect">
+            <a:avLst/>
+          </a:prstGeom>
+          <a:noFill/>
+        </p:spPr>
+        <p:txBody>
+          <a:bodyPr wrap="square">
+            <a:spAutoFit/>
+          </a:bodyPr>
+          <a:lstStyle/>
+          <a:p>
+            <a:pPr>
+              <a:spcAft>
+                <a:spcPts val="500"/>
+              </a:spcAft>
+            </a:pPr>
+            <a:r>
+              <a:rPr sz="1200" b="0" i="0">
+                <a:solidFill>
+                  <a:srgbClr val="1A1A1A"/>
+                </a:solidFill>
+                <a:latin typeface="Arial"/>
+              </a:rPr>
+              <a:t>•  Avellaneda, M., &amp; Stoikov, S. (2008). High-frequency trading in a limit order book. Quantitative Finance, 8(3), 217-224.</a:t>
+            </a:r>
+          </a:p>
+          <a:p>
+            <a:pPr>
+              <a:spcAft>
+                <a:spcPts val="500"/>
+              </a:spcAft>
+            </a:pPr>
+            <a:r>
+              <a:rPr sz="1200" b="0" i="0">
+                <a:solidFill>
+                  <a:srgbClr val="1A1A1A"/>
+                </a:solidFill>
+                <a:latin typeface="Arial"/>
+              </a:rPr>
+              <a:t>•  Gueant, O. (2016). The Financial Mathematics of Market Liquidity, Ch. 4. Chapman &amp; Hall/CRC.</a:t>
+            </a:r>
+          </a:p>
+          <a:p>
+            <a:pPr>
+              <a:spcAft>
+                <a:spcPts val="500"/>
+              </a:spcAft>
+            </a:pPr>
+            <a:r>
+              <a:rPr sz="1200" b="0" i="0">
+                <a:solidFill>
+                  <a:srgbClr val="1A1A1A"/>
+                </a:solidFill>
+                <a:latin typeface="Arial"/>
+              </a:rPr>
+              <a:t>•  Cartea, Jaikumar, &amp; Penalva (2015). Algorithmic and High-Frequency Trading, Ch. 10.</a:t>
+            </a:r>
+          </a:p>
+          <a:p>
+            <a:pPr>
+              <a:spcAft>
+                <a:spcPts val="500"/>
+              </a:spcAft>
+            </a:pPr>
+            <a:r>
+              <a:rPr sz="1200" b="0" i="0">
+                <a:solidFill>
+                  <a:srgbClr val="1A1A1A"/>
+                </a:solidFill>
+                <a:latin typeface="Arial"/>
+              </a:rPr>
+              <a:t>•  Coincall API documentation. https://docs.coincall.com/</a:t>
             </a:r>
           </a:p>
         </p:txBody>

--- a/weekly_presentations/week05_engine_milestone1.pptx
+++ b/weekly_presentations/week05_engine_milestone1.pptx
@@ -16,6 +16,7 @@
     <p:sldId id="264" r:id="rId15"/>
     <p:sldId id="265" r:id="rId16"/>
     <p:sldId id="266" r:id="rId17"/>
+    <p:sldId id="267" r:id="rId18"/>
   </p:sldIdLst>
   <p:sldSz cx="12191695" cy="6858000" type="screen4x3"/>
   <p:notesSz cx="6858000" cy="9144000"/>
@@ -3303,7 +3304,7 @@
           <a:noFill/>
         </p:spPr>
         <p:txBody>
-          <a:bodyPr wrap="square">
+          <a:bodyPr wrap="none">
             <a:spAutoFit/>
           </a:bodyPr>
           <a:lstStyle/>
@@ -3315,7 +3316,7 @@
                 </a:solidFill>
                 <a:latin typeface="Arial"/>
               </a:rPr>
-              <a:t>Reading</a:t>
+              <a:t>Glossary — Key Terms</a:t>
             </a:r>
           </a:p>
         </p:txBody>
@@ -3387,17 +3388,176 @@
           <a:p>
             <a:pPr>
               <a:spcAft>
-                <a:spcPts val="800"/>
+                <a:spcPts val="700"/>
               </a:spcAft>
             </a:pPr>
             <a:r>
-              <a:rPr sz="1700" b="0" i="0">
+              <a:rPr sz="1500" b="1" i="0">
+                <a:solidFill>
+                  <a:srgbClr val="CC0000"/>
+                </a:solidFill>
+                <a:latin typeface="Arial"/>
+              </a:rPr>
+              <a:t>Maximum likelihood (MLE) — </a:t>
+            </a:r>
+            <a:r>
+              <a:rPr sz="1500" b="0" i="0">
                 <a:solidFill>
                   <a:srgbClr val="1A1A1A"/>
                 </a:solidFill>
                 <a:latin typeface="Arial"/>
               </a:rPr>
-              <a:t>•  Avellaneda-Stoikov (2008) [implementation]; Gueant (2016), Ch. 4</a:t>
+              <a:t>fitting parameters by maximizing the likelihood of the data</a:t>
+            </a:r>
+          </a:p>
+          <a:p>
+            <a:pPr>
+              <a:spcAft>
+                <a:spcPts val="700"/>
+              </a:spcAft>
+            </a:pPr>
+            <a:r>
+              <a:rPr sz="1500" b="1" i="0">
+                <a:solidFill>
+                  <a:srgbClr val="CC0000"/>
+                </a:solidFill>
+                <a:latin typeface="Arial"/>
+              </a:rPr>
+              <a:t>Poisson process — </a:t>
+            </a:r>
+            <a:r>
+              <a:rPr sz="1500" b="0" i="0">
+                <a:solidFill>
+                  <a:srgbClr val="1A1A1A"/>
+                </a:solidFill>
+                <a:latin typeface="Arial"/>
+              </a:rPr>
+              <a:t>counting process for random arrivals (here, fills)</a:t>
+            </a:r>
+          </a:p>
+          <a:p>
+            <a:pPr>
+              <a:spcAft>
+                <a:spcPts val="700"/>
+              </a:spcAft>
+            </a:pPr>
+            <a:r>
+              <a:rPr sz="1500" b="1" i="0">
+                <a:solidFill>
+                  <a:srgbClr val="CC0000"/>
+                </a:solidFill>
+                <a:latin typeface="Arial"/>
+              </a:rPr>
+              <a:t>Goodness-of-fit (chi-square) — </a:t>
+            </a:r>
+            <a:r>
+              <a:rPr sz="1500" b="0" i="0">
+                <a:solidFill>
+                  <a:srgbClr val="1A1A1A"/>
+                </a:solidFill>
+                <a:latin typeface="Arial"/>
+              </a:rPr>
+              <a:t>a statistic measuring how well the fit matches the data</a:t>
+            </a:r>
+          </a:p>
+          <a:p>
+            <a:pPr>
+              <a:spcAft>
+                <a:spcPts val="700"/>
+              </a:spcAft>
+            </a:pPr>
+            <a:r>
+              <a:rPr sz="1500" b="1" i="0">
+                <a:solidFill>
+                  <a:srgbClr val="CC0000"/>
+                </a:solidFill>
+                <a:latin typeface="Arial"/>
+              </a:rPr>
+              <a:t>Backtest — </a:t>
+            </a:r>
+            <a:r>
+              <a:rPr sz="1500" b="0" i="0">
+                <a:solidFill>
+                  <a:srgbClr val="1A1A1A"/>
+                </a:solidFill>
+                <a:latin typeface="Arial"/>
+              </a:rPr>
+              <a:t>simulation of a strategy on historical data</a:t>
+            </a:r>
+          </a:p>
+          <a:p>
+            <a:pPr>
+              <a:spcAft>
+                <a:spcPts val="700"/>
+              </a:spcAft>
+            </a:pPr>
+            <a:r>
+              <a:rPr sz="1500" b="1" i="0">
+                <a:solidFill>
+                  <a:srgbClr val="CC0000"/>
+                </a:solidFill>
+                <a:latin typeface="Arial"/>
+              </a:rPr>
+              <a:t>Fill simulator — </a:t>
+            </a:r>
+            <a:r>
+              <a:rPr sz="1500" b="0" i="0">
+                <a:solidFill>
+                  <a:srgbClr val="1A1A1A"/>
+                </a:solidFill>
+                <a:latin typeface="Arial"/>
+              </a:rPr>
+              <a:t>model of which of the maker's quotes get executed</a:t>
+            </a:r>
+          </a:p>
+          <a:p>
+            <a:pPr>
+              <a:spcAft>
+                <a:spcPts val="700"/>
+              </a:spcAft>
+            </a:pPr>
+            <a:r>
+              <a:rPr sz="1500" b="1" i="0">
+                <a:solidFill>
+                  <a:srgbClr val="CC0000"/>
+                </a:solidFill>
+                <a:latin typeface="Arial"/>
+              </a:rPr>
+              <a:t>P&amp;L attribution — </a:t>
+            </a:r>
+            <a:r>
+              <a:rPr sz="1500" b="0" i="0">
+                <a:solidFill>
+                  <a:srgbClr val="1A1A1A"/>
+                </a:solidFill>
+                <a:latin typeface="Arial"/>
+              </a:rPr>
+              <a:t>decomposition of profit into its sources</a:t>
+            </a:r>
+          </a:p>
+          <a:p>
+            <a:pPr>
+              <a:spcAft>
+                <a:spcPts val="700"/>
+              </a:spcAft>
+            </a:pPr>
+            <a:r>
+              <a:rPr sz="1500" b="1" i="0">
+                <a:solidFill>
+                  <a:srgbClr val="CC0000"/>
+                </a:solidFill>
+                <a:latin typeface="Arial"/>
+              </a:rPr>
+              <a:t>Reproducibility — </a:t>
+            </a:r>
+            <a:r>
+              <a:rPr sz="1500" b="0" i="0">
+                <a:solidFill>
+                  <a:srgbClr val="1A1A1A"/>
+                </a:solidFill>
+                <a:latin typeface="Arial"/>
+              </a:rPr>
+              <a:t>identical results on re-run under a fixed random seed</a:t>
             </a:r>
           </a:p>
         </p:txBody>
@@ -3473,6 +3633,164 @@
                 </a:solidFill>
                 <a:latin typeface="Arial"/>
               </a:rPr>
+              <a:t>Reading</a:t>
+            </a:r>
+          </a:p>
+        </p:txBody>
+      </p:sp>
+      <p:sp>
+        <p:nvSpPr>
+          <p:cNvPr id="4" name="Rectangle 3"/>
+          <p:cNvSpPr/>
+          <p:nvPr/>
+        </p:nvSpPr>
+        <p:spPr>
+          <a:xfrm>
+            <a:off x="457200" y="1371600"/>
+            <a:ext cx="11247120" cy="27940"/>
+          </a:xfrm>
+          <a:prstGeom prst="rect">
+            <a:avLst/>
+          </a:prstGeom>
+          <a:solidFill>
+            <a:srgbClr val="CC0000"/>
+          </a:solidFill>
+          <a:ln>
+            <a:noFill/>
+          </a:ln>
+        </p:spPr>
+        <p:style>
+          <a:lnRef idx="1">
+            <a:schemeClr val="accent1"/>
+          </a:lnRef>
+          <a:fillRef idx="3">
+            <a:schemeClr val="accent1"/>
+          </a:fillRef>
+          <a:effectRef idx="2">
+            <a:schemeClr val="accent1"/>
+          </a:effectRef>
+          <a:fontRef idx="minor">
+            <a:schemeClr val="lt1"/>
+          </a:fontRef>
+        </p:style>
+        <p:txBody>
+          <a:bodyPr rtlCol="0" anchor="ctr"/>
+          <a:lstStyle/>
+          <a:p>
+            <a:pPr algn="ctr"/>
+          </a:p>
+        </p:txBody>
+      </p:sp>
+      <p:sp>
+        <p:nvSpPr>
+          <p:cNvPr id="5" name="TextBox 4"/>
+          <p:cNvSpPr txBox="1"/>
+          <p:nvPr/>
+        </p:nvSpPr>
+        <p:spPr>
+          <a:xfrm>
+            <a:off x="640080" y="1600200"/>
+            <a:ext cx="10972800" cy="4937760"/>
+          </a:xfrm>
+          <a:prstGeom prst="rect">
+            <a:avLst/>
+          </a:prstGeom>
+          <a:noFill/>
+        </p:spPr>
+        <p:txBody>
+          <a:bodyPr wrap="square">
+            <a:spAutoFit/>
+          </a:bodyPr>
+          <a:lstStyle/>
+          <a:p>
+            <a:pPr>
+              <a:spcAft>
+                <a:spcPts val="800"/>
+              </a:spcAft>
+            </a:pPr>
+            <a:r>
+              <a:rPr sz="1700" b="0" i="0">
+                <a:solidFill>
+                  <a:srgbClr val="1A1A1A"/>
+                </a:solidFill>
+                <a:latin typeface="Arial"/>
+              </a:rPr>
+              <a:t>•  Avellaneda-Stoikov (2008) [implementation]; Gueant (2016), Ch. 4</a:t>
+            </a:r>
+          </a:p>
+        </p:txBody>
+      </p:sp>
+    </p:spTree>
+  </p:cSld>
+  <p:clrMapOvr>
+    <a:masterClrMapping/>
+  </p:clrMapOvr>
+</p:sld>
+</file>
+
+<file path=ppt/slides/slide12.xml><?xml version="1.0" encoding="utf-8"?>
+<p:sld xmlns:a="http://schemas.openxmlformats.org/drawingml/2006/main" xmlns:p="http://schemas.openxmlformats.org/presentationml/2006/main" xmlns:r="http://schemas.openxmlformats.org/officeDocument/2006/relationships">
+  <p:cSld>
+    <p:spTree>
+      <p:nvGrpSpPr>
+        <p:cNvPr id="1" name=""/>
+        <p:cNvGrpSpPr/>
+        <p:nvPr/>
+      </p:nvGrpSpPr>
+      <p:grpSpPr/>
+      <p:pic>
+        <p:nvPicPr>
+          <p:cNvPr id="2" name="Picture 1" descr="ncsu_logo.png"/>
+          <p:cNvPicPr>
+            <a:picLocks noChangeAspect="1"/>
+          </p:cNvPicPr>
+          <p:nvPr/>
+        </p:nvPicPr>
+        <p:blipFill>
+          <a:blip r:embed="rId2"/>
+          <a:stretch>
+            <a:fillRect/>
+          </a:stretch>
+        </p:blipFill>
+        <p:spPr>
+          <a:xfrm>
+            <a:off x="9784080" y="274320"/>
+            <a:ext cx="2011680" cy="316653"/>
+          </a:xfrm>
+          <a:prstGeom prst="rect">
+            <a:avLst/>
+          </a:prstGeom>
+        </p:spPr>
+      </p:pic>
+      <p:sp>
+        <p:nvSpPr>
+          <p:cNvPr id="3" name="TextBox 2"/>
+          <p:cNvSpPr txBox="1"/>
+          <p:nvPr/>
+        </p:nvSpPr>
+        <p:spPr>
+          <a:xfrm>
+            <a:off x="457200" y="457200"/>
+            <a:ext cx="8961120" cy="822960"/>
+          </a:xfrm>
+          <a:prstGeom prst="rect">
+            <a:avLst/>
+          </a:prstGeom>
+          <a:noFill/>
+        </p:spPr>
+        <p:txBody>
+          <a:bodyPr wrap="square">
+            <a:spAutoFit/>
+          </a:bodyPr>
+          <a:lstStyle/>
+          <a:p>
+            <a:r>
+              <a:rPr sz="2400" b="1" i="0">
+                <a:solidFill>
+                  <a:srgbClr val="990000"/>
+                </a:solidFill>
+                <a:latin typeface="Arial"/>
+              </a:rPr>
               <a:t>References</a:t>
             </a:r>
           </a:p>
@@ -3679,7 +3997,7 @@
                 </a:solidFill>
                 <a:latin typeface="Arial"/>
               </a:rPr>
-              <a:t>Learning Objectives</a:t>
+              <a:t>Contents</a:t>
             </a:r>
           </a:p>
         </p:txBody>
@@ -3751,49 +4069,161 @@
           <a:p>
             <a:pPr>
               <a:spcAft>
-                <a:spcPts val="800"/>
+                <a:spcPts val="500"/>
               </a:spcAft>
             </a:pPr>
             <a:r>
-              <a:rPr sz="1700" b="0" i="0">
+              <a:rPr sz="1200" b="0" i="0">
                 <a:solidFill>
                   <a:srgbClr val="1A1A1A"/>
                 </a:solidFill>
                 <a:latin typeface="Arial"/>
               </a:rPr>
-              <a:t>•  Implement the quotes as a tested PyTorch engine</a:t>
+              <a:t>•  Learning objectives</a:t>
             </a:r>
           </a:p>
           <a:p>
             <a:pPr>
               <a:spcAft>
-                <a:spcPts val="800"/>
+                <a:spcPts val="500"/>
               </a:spcAft>
             </a:pPr>
             <a:r>
-              <a:rPr sz="1700" b="0" i="0">
+              <a:rPr sz="1200" b="0" i="0">
                 <a:solidFill>
                   <a:srgbClr val="1A1A1A"/>
                 </a:solidFill>
                 <a:latin typeface="Arial"/>
               </a:rPr>
-              <a:t>•  Calibrate the fill intensities by maximum likelihood</a:t>
+              <a:t>•  Lecture 1: From Closed Form to Code</a:t>
             </a:r>
           </a:p>
           <a:p>
             <a:pPr>
               <a:spcAft>
-                <a:spcPts val="800"/>
+                <a:spcPts val="500"/>
               </a:spcAft>
             </a:pPr>
             <a:r>
-              <a:rPr sz="1700" b="0" i="0">
+              <a:rPr sz="1200" b="0" i="0">
                 <a:solidFill>
                   <a:srgbClr val="1A1A1A"/>
                 </a:solidFill>
                 <a:latin typeface="Arial"/>
               </a:rPr>
-              <a:t>•  Backtest on one month of Coincall BTC-PERP data</a:t>
+              <a:t>•  Lecture 2: Calibration &amp; Validation</a:t>
+            </a:r>
+          </a:p>
+          <a:p>
+            <a:pPr>
+              <a:spcAft>
+                <a:spcPts val="500"/>
+              </a:spcAft>
+            </a:pPr>
+            <a:r>
+              <a:rPr sz="1200" b="0" i="0">
+                <a:solidFill>
+                  <a:srgbClr val="1A1A1A"/>
+                </a:solidFill>
+                <a:latin typeface="Arial"/>
+              </a:rPr>
+              <a:t>•  Illustration</a:t>
+            </a:r>
+          </a:p>
+          <a:p>
+            <a:pPr>
+              <a:spcAft>
+                <a:spcPts val="500"/>
+              </a:spcAft>
+            </a:pPr>
+            <a:r>
+              <a:rPr sz="1200" b="0" i="0">
+                <a:solidFill>
+                  <a:srgbClr val="1A1A1A"/>
+                </a:solidFill>
+                <a:latin typeface="Arial"/>
+              </a:rPr>
+              <a:t>•  Derivation &amp; rationale</a:t>
+            </a:r>
+          </a:p>
+          <a:p>
+            <a:pPr>
+              <a:spcAft>
+                <a:spcPts val="500"/>
+              </a:spcAft>
+            </a:pPr>
+            <a:r>
+              <a:rPr sz="1200" b="0" i="0">
+                <a:solidFill>
+                  <a:srgbClr val="1A1A1A"/>
+                </a:solidFill>
+                <a:latin typeface="Arial"/>
+              </a:rPr>
+              <a:t>•  Getting the data from Coincall</a:t>
+            </a:r>
+          </a:p>
+          <a:p>
+            <a:pPr>
+              <a:spcAft>
+                <a:spcPts val="500"/>
+              </a:spcAft>
+            </a:pPr>
+            <a:r>
+              <a:rPr sz="1200" b="0" i="0">
+                <a:solidFill>
+                  <a:srgbClr val="1A1A1A"/>
+                </a:solidFill>
+                <a:latin typeface="Arial"/>
+              </a:rPr>
+              <a:t>•  Code: week5_calibrate.py</a:t>
+            </a:r>
+          </a:p>
+          <a:p>
+            <a:pPr>
+              <a:spcAft>
+                <a:spcPts val="500"/>
+              </a:spcAft>
+            </a:pPr>
+            <a:r>
+              <a:rPr sz="1200" b="0" i="0">
+                <a:solidFill>
+                  <a:srgbClr val="1A1A1A"/>
+                </a:solidFill>
+                <a:latin typeface="Arial"/>
+              </a:rPr>
+              <a:t>•  Glossary of key terms</a:t>
+            </a:r>
+          </a:p>
+          <a:p>
+            <a:pPr>
+              <a:spcAft>
+                <a:spcPts val="500"/>
+              </a:spcAft>
+            </a:pPr>
+            <a:r>
+              <a:rPr sz="1200" b="0" i="0">
+                <a:solidFill>
+                  <a:srgbClr val="1A1A1A"/>
+                </a:solidFill>
+                <a:latin typeface="Arial"/>
+              </a:rPr>
+              <a:t>•  Reading</a:t>
+            </a:r>
+          </a:p>
+          <a:p>
+            <a:pPr>
+              <a:spcAft>
+                <a:spcPts val="500"/>
+              </a:spcAft>
+            </a:pPr>
+            <a:r>
+              <a:rPr sz="1200" b="0" i="0">
+                <a:solidFill>
+                  <a:srgbClr val="1A1A1A"/>
+                </a:solidFill>
+                <a:latin typeface="Arial"/>
+              </a:rPr>
+              <a:t>•  References</a:t>
             </a:r>
           </a:p>
         </p:txBody>
@@ -3869,7 +4299,7 @@
                 </a:solidFill>
                 <a:latin typeface="Arial"/>
               </a:rPr>
-              <a:t>Lecture 1: From Closed Form to Code</a:t>
+              <a:t>Learning Objectives</a:t>
             </a:r>
           </a:p>
         </p:txBody>
@@ -3951,7 +4381,7 @@
                 </a:solidFill>
                 <a:latin typeface="Arial"/>
               </a:rPr>
-              <a:t>•  Engine architecture; state from the L2 book</a:t>
+              <a:t>•  Implement the quotes as a tested PyTorch engine</a:t>
             </a:r>
           </a:p>
           <a:p>
@@ -3967,7 +4397,7 @@
                 </a:solidFill>
                 <a:latin typeface="Arial"/>
               </a:rPr>
-              <a:t>•  Map continuous-time quantities to discrete events</a:t>
+              <a:t>•  Calibrate the fill intensities by maximum likelihood</a:t>
             </a:r>
           </a:p>
           <a:p>
@@ -3983,7 +4413,7 @@
                 </a:solidFill>
                 <a:latin typeface="Arial"/>
               </a:rPr>
-              <a:t>•  Calibrate lambda(delta) = A exp(-kappa delta) from fills</a:t>
+              <a:t>•  Backtest on one month of Coincall BTC-PERP data</a:t>
             </a:r>
           </a:p>
         </p:txBody>
@@ -4059,7 +4489,7 @@
                 </a:solidFill>
                 <a:latin typeface="Arial"/>
               </a:rPr>
-              <a:t>Lecture 2: Calibration &amp; Validation</a:t>
+              <a:t>Lecture 1: From Closed Form to Code</a:t>
             </a:r>
           </a:p>
         </p:txBody>
@@ -4141,7 +4571,7 @@
                 </a:solidFill>
                 <a:latin typeface="Arial"/>
               </a:rPr>
-              <a:t>•  Maximum-likelihood fit of A and kappa with goodness-of-fit</a:t>
+              <a:t>•  Engine architecture; state from the L2 book</a:t>
             </a:r>
           </a:p>
           <a:p>
@@ -4157,7 +4587,7 @@
                 </a:solidFill>
                 <a:latin typeface="Arial"/>
               </a:rPr>
-              <a:t>•  Replay engine + fill simulator + P&amp;L attribution</a:t>
+              <a:t>•  Map continuous-time quantities to discrete events</a:t>
             </a:r>
           </a:p>
           <a:p>
@@ -4173,7 +4603,7 @@
                 </a:solidFill>
                 <a:latin typeface="Arial"/>
               </a:rPr>
-              <a:t>•  Reproducibility under a fixed seed</a:t>
+              <a:t>•  Calibrate lambda(delta) = A exp(-kappa delta) from fills</a:t>
             </a:r>
           </a:p>
         </p:txBody>
@@ -4212,7 +4642,7 @@
         </p:blipFill>
         <p:spPr>
           <a:xfrm>
-            <a:off x="9784080" y="228600"/>
+            <a:off x="9784080" y="274320"/>
             <a:ext cx="2011680" cy="316653"/>
           </a:xfrm>
           <a:prstGeom prst="rect">
@@ -4228,8 +4658,8 @@
         </p:nvSpPr>
         <p:spPr>
           <a:xfrm>
-            <a:off x="457200" y="411480"/>
-            <a:ext cx="8961120" cy="731520"/>
+            <a:off x="457200" y="457200"/>
+            <a:ext cx="8961120" cy="822960"/>
           </a:xfrm>
           <a:prstGeom prst="rect">
             <a:avLst/>
@@ -4237,47 +4667,137 @@
           <a:noFill/>
         </p:spPr>
         <p:txBody>
-          <a:bodyPr wrap="none">
+          <a:bodyPr wrap="square">
             <a:spAutoFit/>
           </a:bodyPr>
           <a:lstStyle/>
           <a:p>
             <a:r>
-              <a:rPr sz="2200" b="1" i="0">
+              <a:rPr sz="2400" b="1" i="0">
                 <a:solidFill>
                   <a:srgbClr val="990000"/>
                 </a:solidFill>
                 <a:latin typeface="Arial"/>
               </a:rPr>
-              <a:t>Illustration</a:t>
-            </a:r>
-          </a:p>
-        </p:txBody>
-      </p:sp>
-      <p:pic>
-        <p:nvPicPr>
-          <p:cNvPr id="4" name="Picture 3" descr="week05.png"/>
-          <p:cNvPicPr>
-            <a:picLocks noChangeAspect="1"/>
-          </p:cNvPicPr>
+              <a:t>Lecture 2: Calibration &amp; Validation</a:t>
+            </a:r>
+          </a:p>
+        </p:txBody>
+      </p:sp>
+      <p:sp>
+        <p:nvSpPr>
+          <p:cNvPr id="4" name="Rectangle 3"/>
+          <p:cNvSpPr/>
           <p:nvPr/>
-        </p:nvPicPr>
-        <p:blipFill>
-          <a:blip r:embed="rId3"/>
-          <a:stretch>
-            <a:fillRect/>
-          </a:stretch>
-        </p:blipFill>
-        <p:spPr>
-          <a:xfrm>
-            <a:off x="1280160" y="1371600"/>
-            <a:ext cx="9601200" cy="5225143"/>
+        </p:nvSpPr>
+        <p:spPr>
+          <a:xfrm>
+            <a:off x="457200" y="1371600"/>
+            <a:ext cx="11247120" cy="27940"/>
           </a:xfrm>
           <a:prstGeom prst="rect">
             <a:avLst/>
           </a:prstGeom>
-        </p:spPr>
-      </p:pic>
+          <a:solidFill>
+            <a:srgbClr val="CC0000"/>
+          </a:solidFill>
+          <a:ln>
+            <a:noFill/>
+          </a:ln>
+        </p:spPr>
+        <p:style>
+          <a:lnRef idx="1">
+            <a:schemeClr val="accent1"/>
+          </a:lnRef>
+          <a:fillRef idx="3">
+            <a:schemeClr val="accent1"/>
+          </a:fillRef>
+          <a:effectRef idx="2">
+            <a:schemeClr val="accent1"/>
+          </a:effectRef>
+          <a:fontRef idx="minor">
+            <a:schemeClr val="lt1"/>
+          </a:fontRef>
+        </p:style>
+        <p:txBody>
+          <a:bodyPr rtlCol="0" anchor="ctr"/>
+          <a:lstStyle/>
+          <a:p>
+            <a:pPr algn="ctr"/>
+          </a:p>
+        </p:txBody>
+      </p:sp>
+      <p:sp>
+        <p:nvSpPr>
+          <p:cNvPr id="5" name="TextBox 4"/>
+          <p:cNvSpPr txBox="1"/>
+          <p:nvPr/>
+        </p:nvSpPr>
+        <p:spPr>
+          <a:xfrm>
+            <a:off x="640080" y="1600200"/>
+            <a:ext cx="10972800" cy="4937760"/>
+          </a:xfrm>
+          <a:prstGeom prst="rect">
+            <a:avLst/>
+          </a:prstGeom>
+          <a:noFill/>
+        </p:spPr>
+        <p:txBody>
+          <a:bodyPr wrap="square">
+            <a:spAutoFit/>
+          </a:bodyPr>
+          <a:lstStyle/>
+          <a:p>
+            <a:pPr>
+              <a:spcAft>
+                <a:spcPts val="800"/>
+              </a:spcAft>
+            </a:pPr>
+            <a:r>
+              <a:rPr sz="1700" b="0" i="0">
+                <a:solidFill>
+                  <a:srgbClr val="1A1A1A"/>
+                </a:solidFill>
+                <a:latin typeface="Arial"/>
+              </a:rPr>
+              <a:t>•  Maximum-likelihood fit of A and kappa with goodness-of-fit</a:t>
+            </a:r>
+          </a:p>
+          <a:p>
+            <a:pPr>
+              <a:spcAft>
+                <a:spcPts val="800"/>
+              </a:spcAft>
+            </a:pPr>
+            <a:r>
+              <a:rPr sz="1700" b="0" i="0">
+                <a:solidFill>
+                  <a:srgbClr val="1A1A1A"/>
+                </a:solidFill>
+                <a:latin typeface="Arial"/>
+              </a:rPr>
+              <a:t>•  Replay engine + fill simulator + P&amp;L attribution</a:t>
+            </a:r>
+          </a:p>
+          <a:p>
+            <a:pPr>
+              <a:spcAft>
+                <a:spcPts val="800"/>
+              </a:spcAft>
+            </a:pPr>
+            <a:r>
+              <a:rPr sz="1700" b="0" i="0">
+                <a:solidFill>
+                  <a:srgbClr val="1A1A1A"/>
+                </a:solidFill>
+                <a:latin typeface="Arial"/>
+              </a:rPr>
+              <a:t>•  Reproducibility under a fixed seed</a:t>
+            </a:r>
+          </a:p>
+        </p:txBody>
+      </p:sp>
     </p:spTree>
   </p:cSld>
   <p:clrMapOvr>
@@ -4312,7 +4832,7 @@
         </p:blipFill>
         <p:spPr>
           <a:xfrm>
-            <a:off x="9784080" y="274320"/>
+            <a:off x="9784080" y="228600"/>
             <a:ext cx="2011680" cy="316653"/>
           </a:xfrm>
           <a:prstGeom prst="rect">
@@ -4328,8 +4848,8 @@
         </p:nvSpPr>
         <p:spPr>
           <a:xfrm>
-            <a:off x="457200" y="457200"/>
-            <a:ext cx="8961120" cy="822960"/>
+            <a:off x="457200" y="411480"/>
+            <a:ext cx="8961120" cy="731520"/>
           </a:xfrm>
           <a:prstGeom prst="rect">
             <a:avLst/>
@@ -4337,164 +4857,47 @@
           <a:noFill/>
         </p:spPr>
         <p:txBody>
-          <a:bodyPr wrap="square">
+          <a:bodyPr wrap="none">
             <a:spAutoFit/>
           </a:bodyPr>
           <a:lstStyle/>
           <a:p>
             <a:r>
-              <a:rPr sz="2400" b="1" i="0">
+              <a:rPr sz="2200" b="1" i="0">
                 <a:solidFill>
                   <a:srgbClr val="990000"/>
                 </a:solidFill>
                 <a:latin typeface="Arial"/>
               </a:rPr>
-              <a:t>Key Equations &amp; Why We Choose Them</a:t>
-            </a:r>
-          </a:p>
-          <a:p>
-            <a:r>
-              <a:rPr sz="1300" b="0" i="1">
-                <a:solidFill>
-                  <a:srgbClr val="6D6D6D"/>
-                </a:solidFill>
-                <a:latin typeface="Arial"/>
-              </a:rPr>
-              <a:t>Full derivations in the PDF deck</a:t>
-            </a:r>
-          </a:p>
-        </p:txBody>
-      </p:sp>
-      <p:sp>
-        <p:nvSpPr>
-          <p:cNvPr id="4" name="Rectangle 3"/>
-          <p:cNvSpPr/>
+              <a:t>Illustration</a:t>
+            </a:r>
+          </a:p>
+        </p:txBody>
+      </p:sp>
+      <p:pic>
+        <p:nvPicPr>
+          <p:cNvPr id="4" name="Picture 3" descr="week05.png"/>
+          <p:cNvPicPr>
+            <a:picLocks noChangeAspect="1"/>
+          </p:cNvPicPr>
           <p:nvPr/>
-        </p:nvSpPr>
-        <p:spPr>
-          <a:xfrm>
-            <a:off x="457200" y="1371600"/>
-            <a:ext cx="11247120" cy="27940"/>
+        </p:nvPicPr>
+        <p:blipFill>
+          <a:blip r:embed="rId3"/>
+          <a:stretch>
+            <a:fillRect/>
+          </a:stretch>
+        </p:blipFill>
+        <p:spPr>
+          <a:xfrm>
+            <a:off x="1280160" y="1371600"/>
+            <a:ext cx="9601200" cy="5225143"/>
           </a:xfrm>
           <a:prstGeom prst="rect">
             <a:avLst/>
           </a:prstGeom>
-          <a:solidFill>
-            <a:srgbClr val="CC0000"/>
-          </a:solidFill>
-          <a:ln>
-            <a:noFill/>
-          </a:ln>
-        </p:spPr>
-        <p:style>
-          <a:lnRef idx="1">
-            <a:schemeClr val="accent1"/>
-          </a:lnRef>
-          <a:fillRef idx="3">
-            <a:schemeClr val="accent1"/>
-          </a:fillRef>
-          <a:effectRef idx="2">
-            <a:schemeClr val="accent1"/>
-          </a:effectRef>
-          <a:fontRef idx="minor">
-            <a:schemeClr val="lt1"/>
-          </a:fontRef>
-        </p:style>
-        <p:txBody>
-          <a:bodyPr rtlCol="0" anchor="ctr"/>
-          <a:lstStyle/>
-          <a:p>
-            <a:pPr algn="ctr"/>
-          </a:p>
-        </p:txBody>
-      </p:sp>
-      <p:sp>
-        <p:nvSpPr>
-          <p:cNvPr id="5" name="TextBox 4"/>
-          <p:cNvSpPr txBox="1"/>
-          <p:nvPr/>
-        </p:nvSpPr>
-        <p:spPr>
-          <a:xfrm>
-            <a:off x="640080" y="1600200"/>
-            <a:ext cx="10972800" cy="4937760"/>
-          </a:xfrm>
-          <a:prstGeom prst="rect">
-            <a:avLst/>
-          </a:prstGeom>
-          <a:noFill/>
-        </p:spPr>
-        <p:txBody>
-          <a:bodyPr wrap="square">
-            <a:spAutoFit/>
-          </a:bodyPr>
-          <a:lstStyle/>
-          <a:p>
-            <a:pPr>
-              <a:spcAft>
-                <a:spcPts val="500"/>
-              </a:spcAft>
-            </a:pPr>
-            <a:r>
-              <a:rPr sz="1200" b="0" i="0">
-                <a:solidFill>
-                  <a:srgbClr val="1A1A1A"/>
-                </a:solidFill>
-                <a:latin typeface="Consolas"/>
-              </a:rPr>
-              <a:t>    \mathcal{L}(A,\kappa)=\prod_i \lambda(\delta_i)\,e^{-\lambda(\delta_i)\,\Delta t_i}</a:t>
-            </a:r>
-          </a:p>
-          <a:p>
-            <a:pPr>
-              <a:spcAft>
-                <a:spcPts val="500"/>
-              </a:spcAft>
-            </a:pPr>
-            <a:r>
-              <a:rPr sz="1200" b="0" i="0">
-                <a:solidFill>
-                  <a:srgbClr val="1A1A1A"/>
-                </a:solidFill>
-                <a:latin typeface="Arial"/>
-              </a:rPr>
-              <a:t>•  why: Fills are a (doubly stochastic) Poisson process, so the likelihood of the observed fills given quote distances $\delta_i$ is a product of Poisson densities. We fit by MAXIMUM LIKELIHOOD rather than least-squares because the data are event counts, not Gaussian residuals.</a:t>
-            </a:r>
-          </a:p>
-          <a:p>
-            <a:pPr>
-              <a:spcAft>
-                <a:spcPts val="500"/>
-              </a:spcAft>
-            </a:pPr>
-            <a:r>
-              <a:rPr sz="1200" b="0" i="0">
-                <a:solidFill>
-                  <a:srgbClr val="1A1A1A"/>
-                </a:solidFill>
-                <a:latin typeface="Consolas"/>
-              </a:rPr>
-              <a:t>    -\ln\mathcal{L} = \sum_i\big[\lambda(\delta_i)\Delta t_i - \ln\lambda(\delta_i)\big]</a:t>
-            </a:r>
-          </a:p>
-          <a:p>
-            <a:pPr>
-              <a:spcAft>
-                <a:spcPts val="500"/>
-              </a:spcAft>
-            </a:pPr>
-            <a:r>
-              <a:rPr sz="1200" b="0" i="0">
-                <a:solidFill>
-                  <a:srgbClr val="1A1A1A"/>
-                </a:solidFill>
-                <a:latin typeface="Arial"/>
-              </a:rPr>
-              <a:t>•  why: Minimizing this negative log-likelihood is convex in $\ln A$ and well-behaved in $\kappa$; PyTorch autograd gives the gradients, so a few hundred Adam steps converge.</a:t>
-            </a:r>
-          </a:p>
-        </p:txBody>
-      </p:sp>
+        </p:spPr>
+      </p:pic>
     </p:spTree>
   </p:cSld>
   <p:clrMapOvr>
@@ -4566,7 +4969,7 @@
                 </a:solidFill>
                 <a:latin typeface="Arial"/>
               </a:rPr>
-              <a:t>Getting the Data from Coincall</a:t>
+              <a:t>Key Equations &amp; Why We Choose Them</a:t>
             </a:r>
           </a:p>
           <a:p>
@@ -4577,7 +4980,7 @@
                 </a:solidFill>
                 <a:latin typeface="Arial"/>
               </a:rPr>
-              <a:t>Cross-check exact paths at https://docs.coincall.com/</a:t>
+              <a:t>Full derivations in the PDF deck</a:t>
             </a:r>
           </a:p>
         </p:txBody>
@@ -4657,9 +5060,9 @@
                 <a:solidFill>
                   <a:srgbClr val="1A1A1A"/>
                 </a:solidFill>
-                <a:latin typeface="Arial"/>
-              </a:rPr>
-              <a:t>•  Build the intensity-calibration set from trades vs. your quotes:</a:t>
+                <a:latin typeface="Consolas"/>
+              </a:rPr>
+              <a:t>    \mathcal{L}(A,\kappa)=\prod_i \lambda(\delta_i)\,e^{-\lambda(\delta_i)\,\Delta t_i}</a:t>
             </a:r>
           </a:p>
           <a:p>
@@ -4673,9 +5076,9 @@
                 <a:solidFill>
                   <a:srgbClr val="1A1A1A"/>
                 </a:solidFill>
-                <a:latin typeface="Consolas"/>
-              </a:rPr>
-              <a:t>    Trades:  GET /open/option/trade/lasttrade/v1/{symbol}  (or trade history)</a:t>
+                <a:latin typeface="Arial"/>
+              </a:rPr>
+              <a:t>•  why: Fills are a (doubly stochastic) Poisson process, so the likelihood of the observed fills given quote distances $\delta_i$ is a product of Poisson densities. We fit by MAXIMUM LIKELIHOOD rather than least-squares because the data are event counts, not Gaussian residuals.</a:t>
             </a:r>
           </a:p>
           <a:p>
@@ -4691,7 +5094,7 @@
                 </a:solidFill>
                 <a:latin typeface="Consolas"/>
               </a:rPr>
-              <a:t>    Book:    GET /open/futures/order/orderbook/v1/{symbol}  for the mid</a:t>
+              <a:t>    -\ln\mathcal{L} = \sum_i\big[\lambda(\delta_i)\Delta t_i - \ln\lambda(\delta_i)\big]</a:t>
             </a:r>
           </a:p>
           <a:p>
@@ -4707,39 +5110,7 @@
                 </a:solidFill>
                 <a:latin typeface="Arial"/>
               </a:rPr>
-              <a:t>•  Offline: coincall_btc_perp_trades_2025Q4.parquet + ..._l2_2025Q4.parquet</a:t>
-            </a:r>
-          </a:p>
-          <a:p>
-            <a:pPr>
-              <a:spcAft>
-                <a:spcPts val="500"/>
-              </a:spcAft>
-            </a:pPr>
-            <a:r>
-              <a:rPr sz="1200" b="0" i="0">
-                <a:solidFill>
-                  <a:srgbClr val="1A1A1A"/>
-                </a:solidFill>
-                <a:latin typeface="Arial"/>
-              </a:rPr>
-              <a:t>•  A pre-aggregated coincall_intensity_calibration_set.parquet is provided</a:t>
-            </a:r>
-          </a:p>
-          <a:p>
-            <a:pPr>
-              <a:spcAft>
-                <a:spcPts val="500"/>
-              </a:spcAft>
-            </a:pPr>
-            <a:r>
-              <a:rPr sz="1200" b="0" i="0">
-                <a:solidFill>
-                  <a:srgbClr val="1A1A1A"/>
-                </a:solidFill>
-                <a:latin typeface="Arial"/>
-              </a:rPr>
-              <a:t>•  delta_i = |fill price - mid at fill|; group fills by delta bucket for the MLE</a:t>
+              <a:t>•  why: Minimizing this negative log-likelihood is convex in $\ln A$ and well-behaved in $\kappa$; PyTorch autograd gives the gradients, so a few hundred Adam steps converge.</a:t>
             </a:r>
           </a:p>
         </p:txBody>
@@ -4753,276 +5124,6 @@
 </file>
 
 <file path=ppt/slides/slide8.xml><?xml version="1.0" encoding="utf-8"?>
-<p:sld xmlns:a="http://schemas.openxmlformats.org/drawingml/2006/main" xmlns:p="http://schemas.openxmlformats.org/presentationml/2006/main" xmlns:r="http://schemas.openxmlformats.org/officeDocument/2006/relationships">
-  <p:cSld>
-    <p:spTree>
-      <p:nvGrpSpPr>
-        <p:cNvPr id="1" name=""/>
-        <p:cNvGrpSpPr/>
-        <p:nvPr/>
-      </p:nvGrpSpPr>
-      <p:grpSpPr/>
-      <p:sp>
-        <p:nvSpPr>
-          <p:cNvPr id="2" name="TextBox 1"/>
-          <p:cNvSpPr txBox="1"/>
-          <p:nvPr/>
-        </p:nvSpPr>
-        <p:spPr>
-          <a:xfrm>
-            <a:off x="457200" y="365760"/>
-            <a:ext cx="11247120" cy="640080"/>
-          </a:xfrm>
-          <a:prstGeom prst="rect">
-            <a:avLst/>
-          </a:prstGeom>
-          <a:noFill/>
-        </p:spPr>
-        <p:txBody>
-          <a:bodyPr wrap="none">
-            <a:spAutoFit/>
-          </a:bodyPr>
-          <a:lstStyle/>
-          <a:p>
-            <a:r>
-              <a:rPr sz="1800" b="1" i="0">
-                <a:solidFill>
-                  <a:srgbClr val="990000"/>
-                </a:solidFill>
-                <a:latin typeface="Arial"/>
-              </a:rPr>
-              <a:t>Code — week5_calibrate.py -- intensity MLE with PyTorch autograd</a:t>
-            </a:r>
-          </a:p>
-        </p:txBody>
-      </p:sp>
-      <p:sp>
-        <p:nvSpPr>
-          <p:cNvPr id="3" name="Rectangle 2"/>
-          <p:cNvSpPr/>
-          <p:nvPr/>
-        </p:nvSpPr>
-        <p:spPr>
-          <a:xfrm>
-            <a:off x="457200" y="1097280"/>
-            <a:ext cx="11247120" cy="5394960"/>
-          </a:xfrm>
-          <a:prstGeom prst="rect">
-            <a:avLst/>
-          </a:prstGeom>
-          <a:solidFill>
-            <a:srgbClr val="F5F5F5"/>
-          </a:solidFill>
-          <a:ln w="9525">
-            <a:solidFill>
-              <a:srgbClr val="6D6D6D"/>
-            </a:solidFill>
-          </a:ln>
-        </p:spPr>
-        <p:style>
-          <a:lnRef idx="1">
-            <a:schemeClr val="accent1"/>
-          </a:lnRef>
-          <a:fillRef idx="3">
-            <a:schemeClr val="accent1"/>
-          </a:fillRef>
-          <a:effectRef idx="2">
-            <a:schemeClr val="accent1"/>
-          </a:effectRef>
-          <a:fontRef idx="minor">
-            <a:schemeClr val="lt1"/>
-          </a:fontRef>
-        </p:style>
-        <p:txBody>
-          <a:bodyPr rtlCol="0" anchor="ctr" wrap="square" lIns="182880" tIns="91440"/>
-          <a:lstStyle/>
-          <a:p>
-            <a:pPr algn="ctr">
-              <a:spcAft>
-                <a:spcPts val="0"/>
-              </a:spcAft>
-            </a:pPr>
-            <a:r>
-              <a:rPr sz="1100" b="0" i="0">
-                <a:solidFill>
-                  <a:srgbClr val="1A1A1A"/>
-                </a:solidFill>
-                <a:latin typeface="Consolas"/>
-              </a:rPr>
-              <a:t>import torch</a:t>
-            </a:r>
-          </a:p>
-          <a:p>
-            <a:pPr>
-              <a:spcAft>
-                <a:spcPts val="0"/>
-              </a:spcAft>
-            </a:pPr>
-            <a:r>
-              <a:rPr sz="1100" b="0" i="0">
-                <a:solidFill>
-                  <a:srgbClr val="1A1A1A"/>
-                </a:solidFill>
-                <a:latin typeface="Consolas"/>
-              </a:rPr>
-              <a:t># delta: quote distances at which fills occurred; dt: exposure time per fill</a:t>
-            </a:r>
-          </a:p>
-          <a:p>
-            <a:pPr>
-              <a:spcAft>
-                <a:spcPts val="0"/>
-              </a:spcAft>
-            </a:pPr>
-            <a:r>
-              <a:rPr sz="1100" b="0" i="0">
-                <a:solidFill>
-                  <a:srgbClr val="1A1A1A"/>
-                </a:solidFill>
-                <a:latin typeface="Consolas"/>
-              </a:rPr>
-              <a:t>delta = torch.tensor([...]); dt = torch.tensor([...])</a:t>
-            </a:r>
-          </a:p>
-          <a:p>
-            <a:pPr>
-              <a:spcAft>
-                <a:spcPts val="0"/>
-              </a:spcAft>
-            </a:pPr>
-            <a:r>
-              <a:rPr sz="1100" b="0" i="0">
-                <a:solidFill>
-                  <a:srgbClr val="1A1A1A"/>
-                </a:solidFill>
-                <a:latin typeface="Consolas"/>
-              </a:rPr>
-              <a:t>logA  = torch.zeros(1, requires_grad=True)</a:t>
-            </a:r>
-          </a:p>
-          <a:p>
-            <a:pPr>
-              <a:spcAft>
-                <a:spcPts val="0"/>
-              </a:spcAft>
-            </a:pPr>
-            <a:r>
-              <a:rPr sz="1100" b="0" i="0">
-                <a:solidFill>
-                  <a:srgbClr val="1A1A1A"/>
-                </a:solidFill>
-                <a:latin typeface="Consolas"/>
-              </a:rPr>
-              <a:t>kappa = torch.ones(1,  requires_grad=True)</a:t>
-            </a:r>
-          </a:p>
-          <a:p>
-            <a:pPr>
-              <a:spcAft>
-                <a:spcPts val="0"/>
-              </a:spcAft>
-            </a:pPr>
-            <a:r>
-              <a:rPr sz="1100" b="0" i="0">
-                <a:solidFill>
-                  <a:srgbClr val="1A1A1A"/>
-                </a:solidFill>
-                <a:latin typeface="Consolas"/>
-              </a:rPr>
-              <a:t>opt = torch.optim.Adam([logA, kappa], lr=0.05)</a:t>
-            </a:r>
-          </a:p>
-          <a:p>
-            <a:pPr>
-              <a:spcAft>
-                <a:spcPts val="0"/>
-              </a:spcAft>
-            </a:pPr>
-            <a:r>
-              <a:rPr sz="1100" b="0" i="0">
-                <a:solidFill>
-                  <a:srgbClr val="1A1A1A"/>
-                </a:solidFill>
-                <a:latin typeface="Consolas"/>
-              </a:rPr>
-              <a:t>for step in range(2000):</a:t>
-            </a:r>
-          </a:p>
-          <a:p>
-            <a:pPr>
-              <a:spcAft>
-                <a:spcPts val="0"/>
-              </a:spcAft>
-            </a:pPr>
-            <a:r>
-              <a:rPr sz="1100" b="0" i="0">
-                <a:solidFill>
-                  <a:srgbClr val="1A1A1A"/>
-                </a:solidFill>
-                <a:latin typeface="Consolas"/>
-              </a:rPr>
-              <a:t>    lam = torch.exp(logA) * torch.exp(-kappa.clamp(min=1e-3) * delta)</a:t>
-            </a:r>
-          </a:p>
-          <a:p>
-            <a:pPr>
-              <a:spcAft>
-                <a:spcPts val="0"/>
-              </a:spcAft>
-            </a:pPr>
-            <a:r>
-              <a:rPr sz="1100" b="0" i="0">
-                <a:solidFill>
-                  <a:srgbClr val="1A1A1A"/>
-                </a:solidFill>
-                <a:latin typeface="Consolas"/>
-              </a:rPr>
-              <a:t>    nll = (lam * dt - torch.log(lam)).sum()          # Poisson negative log-lik</a:t>
-            </a:r>
-          </a:p>
-          <a:p>
-            <a:pPr>
-              <a:spcAft>
-                <a:spcPts val="0"/>
-              </a:spcAft>
-            </a:pPr>
-            <a:r>
-              <a:rPr sz="1100" b="0" i="0">
-                <a:solidFill>
-                  <a:srgbClr val="1A1A1A"/>
-                </a:solidFill>
-                <a:latin typeface="Consolas"/>
-              </a:rPr>
-              <a:t>    opt.zero_grad(); nll.backward(); opt.step()</a:t>
-            </a:r>
-          </a:p>
-          <a:p>
-            <a:pPr>
-              <a:spcAft>
-                <a:spcPts val="0"/>
-              </a:spcAft>
-            </a:pPr>
-            <a:r>
-              <a:rPr sz="1100" b="0" i="0">
-                <a:solidFill>
-                  <a:srgbClr val="1A1A1A"/>
-                </a:solidFill>
-                <a:latin typeface="Consolas"/>
-              </a:rPr>
-              <a:t>print("A =", torch.exp(logA).item(), " kappa =", kappa.item())</a:t>
-            </a:r>
-          </a:p>
-        </p:txBody>
-      </p:sp>
-    </p:spTree>
-  </p:cSld>
-  <p:clrMapOvr>
-    <a:masterClrMapping/>
-  </p:clrMapOvr>
-</p:sld>
-</file>
-
-<file path=ppt/slides/slide9.xml><?xml version="1.0" encoding="utf-8"?>
 <p:sld xmlns:a="http://schemas.openxmlformats.org/drawingml/2006/main" xmlns:p="http://schemas.openxmlformats.org/presentationml/2006/main" xmlns:r="http://schemas.openxmlformats.org/officeDocument/2006/relationships">
   <p:cSld>
     <p:spTree>
@@ -5073,7 +5174,7 @@
           <a:noFill/>
         </p:spPr>
         <p:txBody>
-          <a:bodyPr wrap="none">
+          <a:bodyPr wrap="square">
             <a:spAutoFit/>
           </a:bodyPr>
           <a:lstStyle/>
@@ -5085,7 +5186,18 @@
                 </a:solidFill>
                 <a:latin typeface="Arial"/>
               </a:rPr>
-              <a:t>Glossary — Key Terms</a:t>
+              <a:t>Getting the Data from Coincall</a:t>
+            </a:r>
+          </a:p>
+          <a:p>
+            <a:r>
+              <a:rPr sz="1300" b="0" i="1">
+                <a:solidFill>
+                  <a:srgbClr val="6D6D6D"/>
+                </a:solidFill>
+                <a:latin typeface="Arial"/>
+              </a:rPr>
+              <a:t>Cross-check exact paths at https://docs.coincall.com/</a:t>
             </a:r>
           </a:p>
         </p:txBody>
@@ -5157,176 +5269,367 @@
           <a:p>
             <a:pPr>
               <a:spcAft>
-                <a:spcPts val="700"/>
+                <a:spcPts val="500"/>
               </a:spcAft>
             </a:pPr>
             <a:r>
-              <a:rPr sz="1500" b="1" i="0">
-                <a:solidFill>
-                  <a:srgbClr val="CC0000"/>
+              <a:rPr sz="1200" b="0" i="0">
+                <a:solidFill>
+                  <a:srgbClr val="1A1A1A"/>
                 </a:solidFill>
                 <a:latin typeface="Arial"/>
               </a:rPr>
-              <a:t>Maximum likelihood (MLE) — </a:t>
-            </a:r>
-            <a:r>
-              <a:rPr sz="1500" b="0" i="0">
-                <a:solidFill>
-                  <a:srgbClr val="1A1A1A"/>
-                </a:solidFill>
-                <a:latin typeface="Arial"/>
-              </a:rPr>
-              <a:t>fitting parameters by maximizing the likelihood of the data</a:t>
+              <a:t>•  Build the intensity-calibration set from trades vs. your quotes:</a:t>
             </a:r>
           </a:p>
           <a:p>
             <a:pPr>
               <a:spcAft>
-                <a:spcPts val="700"/>
+                <a:spcPts val="500"/>
               </a:spcAft>
             </a:pPr>
             <a:r>
-              <a:rPr sz="1500" b="1" i="0">
-                <a:solidFill>
-                  <a:srgbClr val="CC0000"/>
-                </a:solidFill>
-                <a:latin typeface="Arial"/>
-              </a:rPr>
-              <a:t>Poisson process — </a:t>
-            </a:r>
-            <a:r>
-              <a:rPr sz="1500" b="0" i="0">
+              <a:rPr sz="1200" b="0" i="0">
                 <a:solidFill>
                   <a:srgbClr val="1A1A1A"/>
                 </a:solidFill>
-                <a:latin typeface="Arial"/>
-              </a:rPr>
-              <a:t>counting process for random arrivals (here, fills)</a:t>
+                <a:latin typeface="Consolas"/>
+              </a:rPr>
+              <a:t>    Trades:  GET /open/option/trade/lasttrade/v1/{symbol}  (or trade history)</a:t>
             </a:r>
           </a:p>
           <a:p>
             <a:pPr>
               <a:spcAft>
-                <a:spcPts val="700"/>
+                <a:spcPts val="500"/>
               </a:spcAft>
             </a:pPr>
             <a:r>
-              <a:rPr sz="1500" b="1" i="0">
-                <a:solidFill>
-                  <a:srgbClr val="CC0000"/>
-                </a:solidFill>
-                <a:latin typeface="Arial"/>
-              </a:rPr>
-              <a:t>Goodness-of-fit (chi-square) — </a:t>
-            </a:r>
-            <a:r>
-              <a:rPr sz="1500" b="0" i="0">
+              <a:rPr sz="1200" b="0" i="0">
                 <a:solidFill>
                   <a:srgbClr val="1A1A1A"/>
                 </a:solidFill>
-                <a:latin typeface="Arial"/>
-              </a:rPr>
-              <a:t>a statistic measuring how well the fit matches the data</a:t>
+                <a:latin typeface="Consolas"/>
+              </a:rPr>
+              <a:t>    Book:    GET /open/futures/order/orderbook/v1/{symbol}  for the mid</a:t>
             </a:r>
           </a:p>
           <a:p>
             <a:pPr>
               <a:spcAft>
-                <a:spcPts val="700"/>
+                <a:spcPts val="500"/>
               </a:spcAft>
             </a:pPr>
             <a:r>
-              <a:rPr sz="1500" b="1" i="0">
-                <a:solidFill>
-                  <a:srgbClr val="CC0000"/>
+              <a:rPr sz="1200" b="0" i="0">
+                <a:solidFill>
+                  <a:srgbClr val="1A1A1A"/>
                 </a:solidFill>
                 <a:latin typeface="Arial"/>
               </a:rPr>
-              <a:t>Backtest — </a:t>
-            </a:r>
-            <a:r>
-              <a:rPr sz="1500" b="0" i="0">
-                <a:solidFill>
-                  <a:srgbClr val="1A1A1A"/>
-                </a:solidFill>
-                <a:latin typeface="Arial"/>
-              </a:rPr>
-              <a:t>simulation of a strategy on historical data</a:t>
+              <a:t>•  Offline: coincall_btc_perp_trades_2025Q4.parquet + ..._l2_2025Q4.parquet</a:t>
             </a:r>
           </a:p>
           <a:p>
             <a:pPr>
               <a:spcAft>
-                <a:spcPts val="700"/>
+                <a:spcPts val="500"/>
               </a:spcAft>
             </a:pPr>
             <a:r>
-              <a:rPr sz="1500" b="1" i="0">
-                <a:solidFill>
-                  <a:srgbClr val="CC0000"/>
+              <a:rPr sz="1200" b="0" i="0">
+                <a:solidFill>
+                  <a:srgbClr val="1A1A1A"/>
                 </a:solidFill>
                 <a:latin typeface="Arial"/>
               </a:rPr>
-              <a:t>Fill simulator — </a:t>
-            </a:r>
-            <a:r>
-              <a:rPr sz="1500" b="0" i="0">
-                <a:solidFill>
-                  <a:srgbClr val="1A1A1A"/>
-                </a:solidFill>
-                <a:latin typeface="Arial"/>
-              </a:rPr>
-              <a:t>model of which of the maker's quotes get executed</a:t>
+              <a:t>•  A pre-aggregated coincall_intensity_calibration_set.parquet is provided</a:t>
             </a:r>
           </a:p>
           <a:p>
             <a:pPr>
               <a:spcAft>
-                <a:spcPts val="700"/>
+                <a:spcPts val="500"/>
               </a:spcAft>
             </a:pPr>
             <a:r>
-              <a:rPr sz="1500" b="1" i="0">
-                <a:solidFill>
-                  <a:srgbClr val="CC0000"/>
+              <a:rPr sz="1200" b="0" i="0">
+                <a:solidFill>
+                  <a:srgbClr val="1A1A1A"/>
                 </a:solidFill>
                 <a:latin typeface="Arial"/>
               </a:rPr>
-              <a:t>P&amp;L attribution — </a:t>
-            </a:r>
-            <a:r>
-              <a:rPr sz="1500" b="0" i="0">
+              <a:t>•  delta_i = |fill price - mid at fill|; group fills by delta bucket for the MLE</a:t>
+            </a:r>
+          </a:p>
+        </p:txBody>
+      </p:sp>
+    </p:spTree>
+  </p:cSld>
+  <p:clrMapOvr>
+    <a:masterClrMapping/>
+  </p:clrMapOvr>
+</p:sld>
+</file>
+
+<file path=ppt/slides/slide9.xml><?xml version="1.0" encoding="utf-8"?>
+<p:sld xmlns:a="http://schemas.openxmlformats.org/drawingml/2006/main" xmlns:p="http://schemas.openxmlformats.org/presentationml/2006/main" xmlns:r="http://schemas.openxmlformats.org/officeDocument/2006/relationships">
+  <p:cSld>
+    <p:spTree>
+      <p:nvGrpSpPr>
+        <p:cNvPr id="1" name=""/>
+        <p:cNvGrpSpPr/>
+        <p:nvPr/>
+      </p:nvGrpSpPr>
+      <p:grpSpPr/>
+      <p:sp>
+        <p:nvSpPr>
+          <p:cNvPr id="2" name="TextBox 1"/>
+          <p:cNvSpPr txBox="1"/>
+          <p:nvPr/>
+        </p:nvSpPr>
+        <p:spPr>
+          <a:xfrm>
+            <a:off x="457200" y="365760"/>
+            <a:ext cx="11247120" cy="640080"/>
+          </a:xfrm>
+          <a:prstGeom prst="rect">
+            <a:avLst/>
+          </a:prstGeom>
+          <a:noFill/>
+        </p:spPr>
+        <p:txBody>
+          <a:bodyPr wrap="none">
+            <a:spAutoFit/>
+          </a:bodyPr>
+          <a:lstStyle/>
+          <a:p>
+            <a:r>
+              <a:rPr sz="1800" b="1" i="0">
+                <a:solidFill>
+                  <a:srgbClr val="990000"/>
+                </a:solidFill>
+                <a:latin typeface="Arial"/>
+              </a:rPr>
+              <a:t>Code — week5_calibrate.py -- intensity MLE with PyTorch autograd</a:t>
+            </a:r>
+          </a:p>
+        </p:txBody>
+      </p:sp>
+      <p:sp>
+        <p:nvSpPr>
+          <p:cNvPr id="3" name="Rectangle 2"/>
+          <p:cNvSpPr/>
+          <p:nvPr/>
+        </p:nvSpPr>
+        <p:spPr>
+          <a:xfrm>
+            <a:off x="457200" y="1097280"/>
+            <a:ext cx="11247120" cy="5394960"/>
+          </a:xfrm>
+          <a:prstGeom prst="rect">
+            <a:avLst/>
+          </a:prstGeom>
+          <a:solidFill>
+            <a:srgbClr val="F5F5F5"/>
+          </a:solidFill>
+          <a:ln w="9525">
+            <a:solidFill>
+              <a:srgbClr val="6D6D6D"/>
+            </a:solidFill>
+          </a:ln>
+        </p:spPr>
+        <p:style>
+          <a:lnRef idx="1">
+            <a:schemeClr val="accent1"/>
+          </a:lnRef>
+          <a:fillRef idx="3">
+            <a:schemeClr val="accent1"/>
+          </a:fillRef>
+          <a:effectRef idx="2">
+            <a:schemeClr val="accent1"/>
+          </a:effectRef>
+          <a:fontRef idx="minor">
+            <a:schemeClr val="lt1"/>
+          </a:fontRef>
+        </p:style>
+        <p:txBody>
+          <a:bodyPr rtlCol="0" anchor="ctr" wrap="square" lIns="182880" tIns="91440"/>
+          <a:lstStyle/>
+          <a:p>
+            <a:pPr algn="ctr">
+              <a:spcAft>
+                <a:spcPts val="0"/>
+              </a:spcAft>
+            </a:pPr>
+            <a:r>
+              <a:rPr sz="1100" b="0" i="0">
                 <a:solidFill>
                   <a:srgbClr val="1A1A1A"/>
                 </a:solidFill>
-                <a:latin typeface="Arial"/>
-              </a:rPr>
-              <a:t>decomposition of profit into its sources</a:t>
+                <a:latin typeface="Consolas"/>
+              </a:rPr>
+              <a:t>import torch</a:t>
             </a:r>
           </a:p>
           <a:p>
             <a:pPr>
               <a:spcAft>
-                <a:spcPts val="700"/>
+                <a:spcPts val="0"/>
               </a:spcAft>
             </a:pPr>
             <a:r>
-              <a:rPr sz="1500" b="1" i="0">
-                <a:solidFill>
-                  <a:srgbClr val="CC0000"/>
-                </a:solidFill>
-                <a:latin typeface="Arial"/>
-              </a:rPr>
-              <a:t>Reproducibility — </a:t>
-            </a:r>
-            <a:r>
-              <a:rPr sz="1500" b="0" i="0">
+              <a:rPr sz="1100" b="0" i="0">
                 <a:solidFill>
                   <a:srgbClr val="1A1A1A"/>
                 </a:solidFill>
-                <a:latin typeface="Arial"/>
-              </a:rPr>
-              <a:t>identical results on re-run under a fixed random seed</a:t>
+                <a:latin typeface="Consolas"/>
+              </a:rPr>
+              <a:t># delta: quote distances at which fills occurred; dt: exposure time per fill</a:t>
+            </a:r>
+          </a:p>
+          <a:p>
+            <a:pPr>
+              <a:spcAft>
+                <a:spcPts val="0"/>
+              </a:spcAft>
+            </a:pPr>
+            <a:r>
+              <a:rPr sz="1100" b="0" i="0">
+                <a:solidFill>
+                  <a:srgbClr val="1A1A1A"/>
+                </a:solidFill>
+                <a:latin typeface="Consolas"/>
+              </a:rPr>
+              <a:t>delta = torch.tensor([...]); dt = torch.tensor([...])</a:t>
+            </a:r>
+          </a:p>
+          <a:p>
+            <a:pPr>
+              <a:spcAft>
+                <a:spcPts val="0"/>
+              </a:spcAft>
+            </a:pPr>
+            <a:r>
+              <a:rPr sz="1100" b="0" i="0">
+                <a:solidFill>
+                  <a:srgbClr val="1A1A1A"/>
+                </a:solidFill>
+                <a:latin typeface="Consolas"/>
+              </a:rPr>
+              <a:t>logA  = torch.zeros(1, requires_grad=True)</a:t>
+            </a:r>
+          </a:p>
+          <a:p>
+            <a:pPr>
+              <a:spcAft>
+                <a:spcPts val="0"/>
+              </a:spcAft>
+            </a:pPr>
+            <a:r>
+              <a:rPr sz="1100" b="0" i="0">
+                <a:solidFill>
+                  <a:srgbClr val="1A1A1A"/>
+                </a:solidFill>
+                <a:latin typeface="Consolas"/>
+              </a:rPr>
+              <a:t>kappa = torch.ones(1,  requires_grad=True)</a:t>
+            </a:r>
+          </a:p>
+          <a:p>
+            <a:pPr>
+              <a:spcAft>
+                <a:spcPts val="0"/>
+              </a:spcAft>
+            </a:pPr>
+            <a:r>
+              <a:rPr sz="1100" b="0" i="0">
+                <a:solidFill>
+                  <a:srgbClr val="1A1A1A"/>
+                </a:solidFill>
+                <a:latin typeface="Consolas"/>
+              </a:rPr>
+              <a:t>opt = torch.optim.Adam([logA, kappa], lr=0.05)</a:t>
+            </a:r>
+          </a:p>
+          <a:p>
+            <a:pPr>
+              <a:spcAft>
+                <a:spcPts val="0"/>
+              </a:spcAft>
+            </a:pPr>
+            <a:r>
+              <a:rPr sz="1100" b="0" i="0">
+                <a:solidFill>
+                  <a:srgbClr val="1A1A1A"/>
+                </a:solidFill>
+                <a:latin typeface="Consolas"/>
+              </a:rPr>
+              <a:t>for step in range(2000):</a:t>
+            </a:r>
+          </a:p>
+          <a:p>
+            <a:pPr>
+              <a:spcAft>
+                <a:spcPts val="0"/>
+              </a:spcAft>
+            </a:pPr>
+            <a:r>
+              <a:rPr sz="1100" b="0" i="0">
+                <a:solidFill>
+                  <a:srgbClr val="1A1A1A"/>
+                </a:solidFill>
+                <a:latin typeface="Consolas"/>
+              </a:rPr>
+              <a:t>    lam = torch.exp(logA) * torch.exp(-kappa.clamp(min=1e-3) * delta)</a:t>
+            </a:r>
+          </a:p>
+          <a:p>
+            <a:pPr>
+              <a:spcAft>
+                <a:spcPts val="0"/>
+              </a:spcAft>
+            </a:pPr>
+            <a:r>
+              <a:rPr sz="1100" b="0" i="0">
+                <a:solidFill>
+                  <a:srgbClr val="1A1A1A"/>
+                </a:solidFill>
+                <a:latin typeface="Consolas"/>
+              </a:rPr>
+              <a:t>    nll = (lam * dt - torch.log(lam)).sum()          # Poisson negative log-lik</a:t>
+            </a:r>
+          </a:p>
+          <a:p>
+            <a:pPr>
+              <a:spcAft>
+                <a:spcPts val="0"/>
+              </a:spcAft>
+            </a:pPr>
+            <a:r>
+              <a:rPr sz="1100" b="0" i="0">
+                <a:solidFill>
+                  <a:srgbClr val="1A1A1A"/>
+                </a:solidFill>
+                <a:latin typeface="Consolas"/>
+              </a:rPr>
+              <a:t>    opt.zero_grad(); nll.backward(); opt.step()</a:t>
+            </a:r>
+          </a:p>
+          <a:p>
+            <a:pPr>
+              <a:spcAft>
+                <a:spcPts val="0"/>
+              </a:spcAft>
+            </a:pPr>
+            <a:r>
+              <a:rPr sz="1100" b="0" i="0">
+                <a:solidFill>
+                  <a:srgbClr val="1A1A1A"/>
+                </a:solidFill>
+                <a:latin typeface="Consolas"/>
+              </a:rPr>
+              <a:t>print("A =", torch.exp(logA).item(), " kappa =", kappa.item())</a:t>
             </a:r>
           </a:p>
         </p:txBody>
